--- a/Programacion II/Clases/Clase 2 - Colecciones dinamicas ArrayList/Presentacion.pptx
+++ b/Programacion II/Clases/Clase 2 - Colecciones dinamicas ArrayList/Presentacion.pptx
@@ -4512,7 +4512,7 @@
                 </a:solidFill>
                 <a:latin typeface="Calibri"/>
               </a:rPr>
-              <a:t>Entrega en ExamLab (examlab.lovable.app/app)</a:t>
+              <a:t>Entrega en ExamLab (https://examlab.lovable.app/)</a:t>
             </a:r>
             <a:r>
               <a:rPr sz="1600" b="0" i="0">
@@ -5116,7 +5116,7 @@
                 </a:solidFill>
                 <a:latin typeface="Calibri"/>
               </a:rPr>
-              <a:t>Entrega del taller en ExamLab (examlab.lovable.app/app) · domingo 23:59.</a:t>
+              <a:t>Entrega del taller en ExamLab (https://examlab.lovable.app/) · domingo 23:59.</a:t>
             </a:r>
           </a:p>
         </p:txBody>

--- a/Programacion II/Clases/Clase 2 - Colecciones dinamicas ArrayList/Presentacion.pptx
+++ b/Programacion II/Clases/Clase 2 - Colecciones dinamicas ArrayList/Presentacion.pptx
@@ -6816,22 +6816,6 @@
                 <a:latin typeface="Calibri"/>
               </a:rPr>
               <a:t>–   La ultima idea es de diseno, y es la que hace que este codigo sirva para el resto del proyecto integrador</a:t>
-            </a:r>
-          </a:p>
-          <a:p>
-            <a:pPr>
-              <a:spcAft>
-                <a:spcPts val="800"/>
-              </a:spcAft>
-            </a:pPr>
-            <a:r>
-              <a:rPr sz="1500" b="0" i="0">
-                <a:solidFill>
-                  <a:srgbClr val="333333"/>
-                </a:solidFill>
-                <a:latin typeface="Calibri"/>
-              </a:rPr>
-              <a:t>–   Error tipico del docente que no domina el tema: creer que new ArrayList&lt;&gt;(50) ya trae 50 mascotas adentro y hacer…</a:t>
             </a:r>
           </a:p>
         </p:txBody>

--- a/Programacion II/Clases/Clase 2 - Colecciones dinamicas ArrayList/Presentacion.pptx
+++ b/Programacion II/Clases/Clase 2 - Colecciones dinamicas ArrayList/Presentacion.pptx
@@ -4512,7 +4512,7 @@
                 </a:solidFill>
                 <a:latin typeface="Calibri"/>
               </a:rPr>
-              <a:t>Entrega en ExamLab (https://examlab.lovable.app/)</a:t>
+              <a:t>Entrega en ExamLab (https://uniaj.examlab.workers.dev/)</a:t>
             </a:r>
             <a:r>
               <a:rPr sz="1600" b="0" i="0">
@@ -5116,7 +5116,7 @@
                 </a:solidFill>
                 <a:latin typeface="Calibri"/>
               </a:rPr>
-              <a:t>Entrega del taller en ExamLab (https://examlab.lovable.app/) · domingo 23:59.</a:t>
+              <a:t>Entrega del taller en ExamLab (https://uniaj.examlab.workers.dev/) · domingo 23:59.</a:t>
             </a:r>
           </a:p>
         </p:txBody>

--- a/Programacion II/Clases/Clase 2 - Colecciones dinamicas ArrayList/Presentacion.pptx
+++ b/Programacion II/Clases/Clase 2 - Colecciones dinamicas ArrayList/Presentacion.pptx
@@ -8467,7 +8467,7 @@
         <p:spPr>
           <a:xfrm>
             <a:off x="457200" y="1234440"/>
-            <a:ext cx="11277295" cy="777240"/>
+            <a:ext cx="11277295" cy="950976"/>
           </a:xfrm>
           <a:prstGeom prst="roundRect">
             <a:avLst>
@@ -8511,7 +8511,7 @@
         </p:nvSpPr>
         <p:spPr>
           <a:xfrm>
-            <a:off x="594360" y="1403604"/>
+            <a:off x="594360" y="1490472"/>
             <a:ext cx="438912" cy="438912"/>
           </a:xfrm>
           <a:prstGeom prst="roundRect">
@@ -8556,7 +8556,7 @@
         </p:nvSpPr>
         <p:spPr>
           <a:xfrm>
-            <a:off x="594360" y="1403604"/>
+            <a:off x="594360" y="1490472"/>
             <a:ext cx="438912" cy="438912"/>
           </a:xfrm>
           <a:prstGeom prst="rect">
@@ -8590,7 +8590,7 @@
         <p:spPr>
           <a:xfrm>
             <a:off x="1188720" y="1325880"/>
-            <a:ext cx="10271455" cy="612647"/>
+            <a:ext cx="10271455" cy="786384"/>
           </a:xfrm>
           <a:prstGeom prst="rect">
             <a:avLst/>
@@ -8621,8 +8621,8 @@
         </p:nvSpPr>
         <p:spPr>
           <a:xfrm>
-            <a:off x="457200" y="2103120"/>
-            <a:ext cx="11277295" cy="777240"/>
+            <a:off x="457200" y="2276856"/>
+            <a:ext cx="11277295" cy="950976"/>
           </a:xfrm>
           <a:prstGeom prst="roundRect">
             <a:avLst>
@@ -8666,7 +8666,7 @@
         </p:nvSpPr>
         <p:spPr>
           <a:xfrm>
-            <a:off x="594360" y="2272284"/>
+            <a:off x="594360" y="2532888"/>
             <a:ext cx="438912" cy="438912"/>
           </a:xfrm>
           <a:prstGeom prst="roundRect">
@@ -8711,7 +8711,7 @@
         </p:nvSpPr>
         <p:spPr>
           <a:xfrm>
-            <a:off x="594360" y="2272284"/>
+            <a:off x="594360" y="2532888"/>
             <a:ext cx="438912" cy="438912"/>
           </a:xfrm>
           <a:prstGeom prst="rect">
@@ -8744,8 +8744,8 @@
         </p:nvSpPr>
         <p:spPr>
           <a:xfrm>
-            <a:off x="1188720" y="2194560"/>
-            <a:ext cx="10271455" cy="612647"/>
+            <a:off x="1188720" y="2368296"/>
+            <a:ext cx="10271455" cy="786384"/>
           </a:xfrm>
           <a:prstGeom prst="rect">
             <a:avLst/>
@@ -8776,8 +8776,8 @@
         </p:nvSpPr>
         <p:spPr>
           <a:xfrm>
-            <a:off x="457200" y="2971800"/>
-            <a:ext cx="11277295" cy="777240"/>
+            <a:off x="457200" y="3319272"/>
+            <a:ext cx="11277295" cy="950976"/>
           </a:xfrm>
           <a:prstGeom prst="roundRect">
             <a:avLst>
@@ -8821,7 +8821,7 @@
         </p:nvSpPr>
         <p:spPr>
           <a:xfrm>
-            <a:off x="594360" y="3140964"/>
+            <a:off x="594360" y="3575304"/>
             <a:ext cx="438912" cy="438912"/>
           </a:xfrm>
           <a:prstGeom prst="roundRect">
@@ -8866,7 +8866,7 @@
         </p:nvSpPr>
         <p:spPr>
           <a:xfrm>
-            <a:off x="594360" y="3140964"/>
+            <a:off x="594360" y="3575304"/>
             <a:ext cx="438912" cy="438912"/>
           </a:xfrm>
           <a:prstGeom prst="rect">
@@ -8899,8 +8899,8 @@
         </p:nvSpPr>
         <p:spPr>
           <a:xfrm>
-            <a:off x="1188720" y="3063240"/>
-            <a:ext cx="10271455" cy="612647"/>
+            <a:off x="1188720" y="3410712"/>
+            <a:ext cx="10271455" cy="786384"/>
           </a:xfrm>
           <a:prstGeom prst="rect">
             <a:avLst/>
@@ -8931,8 +8931,8 @@
         </p:nvSpPr>
         <p:spPr>
           <a:xfrm>
-            <a:off x="457200" y="3840479"/>
-            <a:ext cx="11277295" cy="777240"/>
+            <a:off x="457200" y="4361688"/>
+            <a:ext cx="11277295" cy="950976"/>
           </a:xfrm>
           <a:prstGeom prst="roundRect">
             <a:avLst>
@@ -8976,7 +8976,7 @@
         </p:nvSpPr>
         <p:spPr>
           <a:xfrm>
-            <a:off x="594360" y="4009643"/>
+            <a:off x="594360" y="4617720"/>
             <a:ext cx="438912" cy="438912"/>
           </a:xfrm>
           <a:prstGeom prst="roundRect">
@@ -9021,7 +9021,7 @@
         </p:nvSpPr>
         <p:spPr>
           <a:xfrm>
-            <a:off x="594360" y="4009643"/>
+            <a:off x="594360" y="4617720"/>
             <a:ext cx="438912" cy="438912"/>
           </a:xfrm>
           <a:prstGeom prst="rect">
@@ -9054,8 +9054,8 @@
         </p:nvSpPr>
         <p:spPr>
           <a:xfrm>
-            <a:off x="1188720" y="3931919"/>
-            <a:ext cx="10271455" cy="612647"/>
+            <a:off x="1188720" y="4453128"/>
+            <a:ext cx="10271455" cy="786384"/>
           </a:xfrm>
           <a:prstGeom prst="rect">
             <a:avLst/>
@@ -9086,8 +9086,8 @@
         </p:nvSpPr>
         <p:spPr>
           <a:xfrm>
-            <a:off x="457200" y="4709160"/>
-            <a:ext cx="11277295" cy="777240"/>
+            <a:off x="457200" y="5404104"/>
+            <a:ext cx="11277295" cy="950976"/>
           </a:xfrm>
           <a:prstGeom prst="roundRect">
             <a:avLst>
@@ -9131,7 +9131,7 @@
         </p:nvSpPr>
         <p:spPr>
           <a:xfrm>
-            <a:off x="594360" y="4878324"/>
+            <a:off x="594360" y="5660136"/>
             <a:ext cx="438912" cy="438912"/>
           </a:xfrm>
           <a:prstGeom prst="roundRect">
@@ -9176,7 +9176,7 @@
         </p:nvSpPr>
         <p:spPr>
           <a:xfrm>
-            <a:off x="594360" y="4878324"/>
+            <a:off x="594360" y="5660136"/>
             <a:ext cx="438912" cy="438912"/>
           </a:xfrm>
           <a:prstGeom prst="rect">
@@ -9209,8 +9209,8 @@
         </p:nvSpPr>
         <p:spPr>
           <a:xfrm>
-            <a:off x="1188720" y="4800600"/>
-            <a:ext cx="10271455" cy="612647"/>
+            <a:off x="1188720" y="5495544"/>
+            <a:ext cx="10271455" cy="786384"/>
           </a:xfrm>
           <a:prstGeom prst="rect">
             <a:avLst/>

--- a/Programacion II/Clases/Clase 2 - Colecciones dinamicas ArrayList/Presentacion.pptx
+++ b/Programacion II/Clases/Clase 2 - Colecciones dinamicas ArrayList/Presentacion.pptx
@@ -4327,7 +4327,7 @@
               </a:spcAft>
             </a:pPr>
             <a:r>
-              <a:rPr sz="1600" b="0" i="0">
+              <a:rPr sz="2000" b="0" i="0">
                 <a:solidFill>
                   <a:srgbClr val="333333"/>
                 </a:solidFill>
@@ -4336,7 +4336,7 @@
               <a:t>–   </a:t>
             </a:r>
             <a:r>
-              <a:rPr sz="1600" b="1" i="0">
+              <a:rPr sz="2000" b="1" i="0">
                 <a:solidFill>
                   <a:srgbClr val="333333"/>
                 </a:solidFill>
@@ -4345,7 +4345,7 @@
               <a:t>Entregable:</a:t>
             </a:r>
             <a:r>
-              <a:rPr sz="1600" b="0" i="0">
+              <a:rPr sz="2000" b="0" i="0">
                 <a:solidFill>
                   <a:srgbClr val="333333"/>
                 </a:solidFill>
@@ -4361,7 +4361,7 @@
               </a:spcAft>
             </a:pPr>
             <a:r>
-              <a:rPr sz="1600" b="0" i="0">
+              <a:rPr sz="2000" b="0" i="0">
                 <a:solidFill>
                   <a:srgbClr val="333333"/>
                 </a:solidFill>
@@ -4370,7 +4370,7 @@
               <a:t>–   </a:t>
             </a:r>
             <a:r>
-              <a:rPr sz="1600" b="1" i="0">
+              <a:rPr sz="2000" b="1" i="0">
                 <a:solidFill>
                   <a:srgbClr val="333333"/>
                 </a:solidFill>
@@ -4379,7 +4379,7 @@
               <a:t>Exito:</a:t>
             </a:r>
             <a:r>
-              <a:rPr sz="1600" b="0" i="0">
+              <a:rPr sz="2000" b="0" i="0">
                 <a:solidFill>
                   <a:srgbClr val="333333"/>
                 </a:solidFill>
@@ -4395,7 +4395,7 @@
               </a:spcAft>
             </a:pPr>
             <a:r>
-              <a:rPr sz="1600" b="0" i="0">
+              <a:rPr sz="2000" b="0" i="0">
                 <a:solidFill>
                   <a:srgbClr val="333333"/>
                 </a:solidFill>
@@ -4404,7 +4404,7 @@
               <a:t>–   </a:t>
             </a:r>
             <a:r>
-              <a:rPr sz="1600" b="1" i="0">
+              <a:rPr sz="2000" b="1" i="0">
                 <a:solidFill>
                   <a:srgbClr val="333333"/>
                 </a:solidFill>
@@ -4413,7 +4413,7 @@
               <a:t>Exito:</a:t>
             </a:r>
             <a:r>
-              <a:rPr sz="1600" b="0" i="0">
+              <a:rPr sz="2000" b="0" i="0">
                 <a:solidFill>
                   <a:srgbClr val="333333"/>
                 </a:solidFill>
@@ -4429,7 +4429,7 @@
               </a:spcAft>
             </a:pPr>
             <a:r>
-              <a:rPr sz="1600" b="0" i="0">
+              <a:rPr sz="2000" b="0" i="0">
                 <a:solidFill>
                   <a:srgbClr val="333333"/>
                 </a:solidFill>
@@ -4438,7 +4438,7 @@
               <a:t>–   </a:t>
             </a:r>
             <a:r>
-              <a:rPr sz="1600" b="1" i="0">
+              <a:rPr sz="2000" b="1" i="0">
                 <a:solidFill>
                   <a:srgbClr val="333333"/>
                 </a:solidFill>
@@ -4447,7 +4447,7 @@
               <a:t>Exito:</a:t>
             </a:r>
             <a:r>
-              <a:rPr sz="1600" b="0" i="0">
+              <a:rPr sz="2000" b="0" i="0">
                 <a:solidFill>
                   <a:srgbClr val="333333"/>
                 </a:solidFill>
@@ -4463,7 +4463,7 @@
               </a:spcAft>
             </a:pPr>
             <a:r>
-              <a:rPr sz="1600" b="0" i="0">
+              <a:rPr sz="2000" b="0" i="0">
                 <a:solidFill>
                   <a:srgbClr val="333333"/>
                 </a:solidFill>
@@ -4472,7 +4472,7 @@
               <a:t>–   </a:t>
             </a:r>
             <a:r>
-              <a:rPr sz="1600" b="1" i="0">
+              <a:rPr sz="2000" b="1" i="0">
                 <a:solidFill>
                   <a:srgbClr val="333333"/>
                 </a:solidFill>
@@ -4481,7 +4481,7 @@
               <a:t>Exito:</a:t>
             </a:r>
             <a:r>
-              <a:rPr sz="1600" b="0" i="0">
+              <a:rPr sz="2000" b="0" i="0">
                 <a:solidFill>
                   <a:srgbClr val="333333"/>
                 </a:solidFill>
@@ -4497,7 +4497,7 @@
               </a:spcAft>
             </a:pPr>
             <a:r>
-              <a:rPr sz="1600" b="0" i="0">
+              <a:rPr sz="2000" b="0" i="0">
                 <a:solidFill>
                   <a:srgbClr val="333333"/>
                 </a:solidFill>
@@ -4506,7 +4506,7 @@
               <a:t>–   </a:t>
             </a:r>
             <a:r>
-              <a:rPr sz="1600" b="1" i="0">
+              <a:rPr sz="2000" b="1" i="0">
                 <a:solidFill>
                   <a:srgbClr val="333333"/>
                 </a:solidFill>
@@ -4515,7 +4515,7 @@
               <a:t>Entrega en ExamLab (https://uniaj.examlab.workers.dev/)</a:t>
             </a:r>
             <a:r>
-              <a:rPr sz="1600" b="0" i="0">
+              <a:rPr sz="2000" b="0" i="0">
                 <a:solidFill>
                   <a:srgbClr val="333333"/>
                 </a:solidFill>
@@ -5562,7 +5562,7 @@
               </a:spcAft>
             </a:pPr>
             <a:r>
-              <a:rPr sz="1600" b="0" i="0">
+              <a:rPr sz="2000" b="0" i="0">
                 <a:solidFill>
                   <a:srgbClr val="333333"/>
                 </a:solidFill>
@@ -5571,7 +5571,7 @@
               <a:t>–   </a:t>
             </a:r>
             <a:r>
-              <a:rPr sz="1600" b="1" i="0">
+              <a:rPr sz="2000" b="1" i="0">
                 <a:solidFill>
                   <a:srgbClr val="333333"/>
                 </a:solidFill>
@@ -5580,7 +5580,7 @@
               <a:t>Hoy avanzamos VetCare en:</a:t>
             </a:r>
             <a:r>
-              <a:rPr sz="1600" b="0" i="0">
+              <a:rPr sz="2000" b="0" i="0">
                 <a:solidFill>
                   <a:srgbClr val="333333"/>
                 </a:solidFill>
@@ -5596,7 +5596,7 @@
               </a:spcAft>
             </a:pPr>
             <a:r>
-              <a:rPr sz="1600" b="0" i="0">
+              <a:rPr sz="2000" b="0" i="0">
                 <a:solidFill>
                   <a:srgbClr val="333333"/>
                 </a:solidFill>
@@ -5605,7 +5605,7 @@
               <a:t>–   Herramienta: </a:t>
             </a:r>
             <a:r>
-              <a:rPr sz="1600" b="1" i="0">
+              <a:rPr sz="2000" b="1" i="0">
                 <a:solidFill>
                   <a:srgbClr val="333333"/>
                 </a:solidFill>
@@ -5614,7 +5614,7 @@
               <a:t>Apache NetBeans</a:t>
             </a:r>
             <a:r>
-              <a:rPr sz="1600" b="0" i="0">
+              <a:rPr sz="2000" b="0" i="0">
                 <a:solidFill>
                   <a:srgbClr val="333333"/>
                 </a:solidFill>
@@ -5623,7 +5623,7 @@
               <a:t> · Bloque </a:t>
             </a:r>
             <a:r>
-              <a:rPr sz="1600" b="1" i="0">
+              <a:rPr sz="2000" b="1" i="0">
                 <a:solidFill>
                   <a:srgbClr val="333333"/>
                 </a:solidFill>
@@ -5639,7 +5639,7 @@
               </a:spcAft>
             </a:pPr>
             <a:r>
-              <a:rPr sz="1600" b="0" i="0">
+              <a:rPr sz="2000" b="0" i="0">
                 <a:solidFill>
                   <a:srgbClr val="333333"/>
                 </a:solidFill>
@@ -5648,7 +5648,7 @@
               <a:t>–   </a:t>
             </a:r>
             <a:r>
-              <a:rPr sz="1600" b="1" i="0">
+              <a:rPr sz="2000" b="1" i="0">
                 <a:solidFill>
                   <a:srgbClr val="333333"/>
                 </a:solidFill>
@@ -5657,7 +5657,7 @@
               <a:t>Entregable de hoy:</a:t>
             </a:r>
             <a:r>
-              <a:rPr sz="1600" b="0" i="0">
+              <a:rPr sz="2000" b="0" i="0">
                 <a:solidFill>
                   <a:srgbClr val="333333"/>
                 </a:solidFill>
@@ -5673,7 +5673,7 @@
               </a:spcAft>
             </a:pPr>
             <a:r>
-              <a:rPr sz="1600" b="0" i="0">
+              <a:rPr sz="2000" b="0" i="0">
                 <a:solidFill>
                   <a:srgbClr val="333333"/>
                 </a:solidFill>
@@ -5997,7 +5997,7 @@
         <p:spPr>
           <a:xfrm>
             <a:off x="502920" y="2587752"/>
-            <a:ext cx="2164019" cy="2560320"/>
+            <a:ext cx="2164019" cy="3310128"/>
           </a:xfrm>
           <a:prstGeom prst="rect">
             <a:avLst/>
@@ -6112,7 +6112,7 @@
         <p:spPr>
           <a:xfrm>
             <a:off x="2758379" y="2587752"/>
-            <a:ext cx="2164019" cy="2560320"/>
+            <a:ext cx="2164019" cy="3310128"/>
           </a:xfrm>
           <a:prstGeom prst="rect">
             <a:avLst/>
@@ -6227,7 +6227,7 @@
         <p:spPr>
           <a:xfrm>
             <a:off x="5013838" y="2587752"/>
-            <a:ext cx="2164019" cy="2560320"/>
+            <a:ext cx="2164019" cy="3310128"/>
           </a:xfrm>
           <a:prstGeom prst="rect">
             <a:avLst/>
@@ -6342,7 +6342,7 @@
         <p:spPr>
           <a:xfrm>
             <a:off x="7269297" y="2587752"/>
-            <a:ext cx="2164019" cy="2560320"/>
+            <a:ext cx="2164019" cy="3310128"/>
           </a:xfrm>
           <a:prstGeom prst="rect">
             <a:avLst/>
@@ -6457,7 +6457,7 @@
         <p:spPr>
           <a:xfrm>
             <a:off x="9524756" y="2587752"/>
-            <a:ext cx="2164019" cy="2560320"/>
+            <a:ext cx="2164019" cy="3310128"/>
           </a:xfrm>
           <a:prstGeom prst="rect">
             <a:avLst/>
@@ -6491,8 +6491,8 @@
         </p:nvSpPr>
         <p:spPr>
           <a:xfrm>
-            <a:off x="457200" y="5943600"/>
-            <a:ext cx="11277295" cy="365760"/>
+            <a:off x="457200" y="5806440"/>
+            <a:ext cx="11277295" cy="640080"/>
           </a:xfrm>
           <a:prstGeom prst="rect">
             <a:avLst/>
@@ -6745,7 +6745,7 @@
               </a:spcAft>
             </a:pPr>
             <a:r>
-              <a:rPr sz="1500" b="0" i="0">
+              <a:rPr sz="2000" b="0" i="0">
                 <a:solidFill>
                   <a:srgbClr val="333333"/>
                 </a:solidFill>
@@ -6761,7 +6761,7 @@
               </a:spcAft>
             </a:pPr>
             <a:r>
-              <a:rPr sz="1500" b="0" i="0">
+              <a:rPr sz="2000" b="0" i="0">
                 <a:solidFill>
                   <a:srgbClr val="333333"/>
                 </a:solidFill>
@@ -6777,7 +6777,7 @@
               </a:spcAft>
             </a:pPr>
             <a:r>
-              <a:rPr sz="1500" b="0" i="0">
+              <a:rPr sz="2000" b="0" i="0">
                 <a:solidFill>
                   <a:srgbClr val="333333"/>
                 </a:solidFill>
@@ -6793,7 +6793,7 @@
               </a:spcAft>
             </a:pPr>
             <a:r>
-              <a:rPr sz="1500" b="0" i="0">
+              <a:rPr sz="2000" b="0" i="0">
                 <a:solidFill>
                   <a:srgbClr val="333333"/>
                 </a:solidFill>
@@ -6809,7 +6809,7 @@
               </a:spcAft>
             </a:pPr>
             <a:r>
-              <a:rPr sz="1500" b="0" i="0">
+              <a:rPr sz="2000" b="0" i="0">
                 <a:solidFill>
                   <a:srgbClr val="333333"/>
                 </a:solidFill>
@@ -7145,11 +7145,11 @@
           <a:p>
             <a:pPr>
               <a:spcAft>
-                <a:spcPts val="400"/>
+                <a:spcPts val="314"/>
               </a:spcAft>
             </a:pPr>
             <a:r>
-              <a:rPr sz="1400" b="0" i="0">
+              <a:rPr sz="1100" b="0" i="0">
                 <a:solidFill>
                   <a:srgbClr val="FFFFFF"/>
                 </a:solidFill>
@@ -7161,11 +7161,11 @@
           <a:p>
             <a:pPr>
               <a:spcAft>
-                <a:spcPts val="400"/>
+                <a:spcPts val="314"/>
               </a:spcAft>
             </a:pPr>
             <a:r>
-              <a:rPr sz="1400" b="0" i="0">
+              <a:rPr sz="1100" b="0" i="0">
                 <a:solidFill>
                   <a:srgbClr val="FFFFFF"/>
                 </a:solidFill>
@@ -7177,11 +7177,11 @@
           <a:p>
             <a:pPr>
               <a:spcAft>
-                <a:spcPts val="400"/>
+                <a:spcPts val="314"/>
               </a:spcAft>
             </a:pPr>
             <a:r>
-              <a:rPr sz="1400" b="0" i="0">
+              <a:rPr sz="1100" b="0" i="0">
                 <a:solidFill>
                   <a:srgbClr val="FFFFFF"/>
                 </a:solidFill>
@@ -7193,11 +7193,11 @@
           <a:p>
             <a:pPr>
               <a:spcAft>
-                <a:spcPts val="400"/>
+                <a:spcPts val="314"/>
               </a:spcAft>
             </a:pPr>
             <a:r>
-              <a:rPr sz="1400" b="0" i="0">
+              <a:rPr sz="1100" b="0" i="0">
                 <a:solidFill>
                   <a:srgbClr val="FFFFFF"/>
                 </a:solidFill>
@@ -7209,11 +7209,11 @@
           <a:p>
             <a:pPr>
               <a:spcAft>
-                <a:spcPts val="400"/>
+                <a:spcPts val="314"/>
               </a:spcAft>
             </a:pPr>
             <a:r>
-              <a:rPr sz="1400" b="0" i="0">
+              <a:rPr sz="1100" b="0" i="0">
                 <a:solidFill>
                   <a:srgbClr val="FFFFFF"/>
                 </a:solidFill>
@@ -7225,11 +7225,11 @@
           <a:p>
             <a:pPr>
               <a:spcAft>
-                <a:spcPts val="400"/>
+                <a:spcPts val="314"/>
               </a:spcAft>
             </a:pPr>
             <a:r>
-              <a:rPr sz="1400" b="0" i="0">
+              <a:rPr sz="1100" b="0" i="0">
                 <a:solidFill>
                   <a:srgbClr val="FFFFFF"/>
                 </a:solidFill>
@@ -7241,11 +7241,11 @@
           <a:p>
             <a:pPr>
               <a:spcAft>
-                <a:spcPts val="400"/>
+                <a:spcPts val="314"/>
               </a:spcAft>
             </a:pPr>
             <a:r>
-              <a:rPr sz="1400" b="0" i="0">
+              <a:rPr sz="1100" b="0" i="0">
                 <a:solidFill>
                   <a:srgbClr val="FFFFFF"/>
                 </a:solidFill>
@@ -7257,11 +7257,11 @@
           <a:p>
             <a:pPr>
               <a:spcAft>
-                <a:spcPts val="400"/>
+                <a:spcPts val="314"/>
               </a:spcAft>
             </a:pPr>
             <a:r>
-              <a:rPr sz="1400" b="0" i="0">
+              <a:rPr sz="1100" b="0" i="0">
                 <a:solidFill>
                   <a:srgbClr val="FFFFFF"/>
                 </a:solidFill>
@@ -7273,11 +7273,11 @@
           <a:p>
             <a:pPr>
               <a:spcAft>
-                <a:spcPts val="400"/>
+                <a:spcPts val="314"/>
               </a:spcAft>
             </a:pPr>
             <a:r>
-              <a:rPr sz="1400" b="0" i="0">
+              <a:rPr sz="1100" b="0" i="0">
                 <a:solidFill>
                   <a:srgbClr val="FFFFFF"/>
                 </a:solidFill>
@@ -7289,11 +7289,11 @@
           <a:p>
             <a:pPr>
               <a:spcAft>
-                <a:spcPts val="400"/>
+                <a:spcPts val="314"/>
               </a:spcAft>
             </a:pPr>
             <a:r>
-              <a:rPr sz="1400" b="0" i="0">
+              <a:rPr sz="1100" b="0" i="0">
                 <a:solidFill>
                   <a:srgbClr val="FFFFFF"/>
                 </a:solidFill>
@@ -7305,11 +7305,11 @@
           <a:p>
             <a:pPr>
               <a:spcAft>
-                <a:spcPts val="400"/>
+                <a:spcPts val="314"/>
               </a:spcAft>
             </a:pPr>
             <a:r>
-              <a:rPr sz="1400" b="0" i="0">
+              <a:rPr sz="1100" b="0" i="0">
                 <a:solidFill>
                   <a:srgbClr val="FFFFFF"/>
                 </a:solidFill>
@@ -7321,11 +7321,11 @@
           <a:p>
             <a:pPr>
               <a:spcAft>
-                <a:spcPts val="400"/>
+                <a:spcPts val="314"/>
               </a:spcAft>
             </a:pPr>
             <a:r>
-              <a:rPr sz="1400" b="0" i="0">
+              <a:rPr sz="1100" b="0" i="0">
                 <a:solidFill>
                   <a:srgbClr val="FFFFFF"/>
                 </a:solidFill>
@@ -7337,11 +7337,11 @@
           <a:p>
             <a:pPr>
               <a:spcAft>
-                <a:spcPts val="400"/>
+                <a:spcPts val="314"/>
               </a:spcAft>
             </a:pPr>
             <a:r>
-              <a:rPr sz="1400" b="0" i="0">
+              <a:rPr sz="1100" b="0" i="0">
                 <a:solidFill>
                   <a:srgbClr val="FFFFFF"/>
                 </a:solidFill>
@@ -7353,11 +7353,11 @@
           <a:p>
             <a:pPr>
               <a:spcAft>
-                <a:spcPts val="400"/>
+                <a:spcPts val="314"/>
               </a:spcAft>
             </a:pPr>
             <a:r>
-              <a:rPr sz="1400" b="0" i="0">
+              <a:rPr sz="1100" b="0" i="0">
                 <a:solidFill>
                   <a:srgbClr val="FFFFFF"/>
                 </a:solidFill>
@@ -7369,11 +7369,11 @@
           <a:p>
             <a:pPr>
               <a:spcAft>
-                <a:spcPts val="400"/>
+                <a:spcPts val="314"/>
               </a:spcAft>
             </a:pPr>
             <a:r>
-              <a:rPr sz="1400" b="0" i="0">
+              <a:rPr sz="1100" b="0" i="0">
                 <a:solidFill>
                   <a:srgbClr val="FFFFFF"/>
                 </a:solidFill>
@@ -7385,11 +7385,11 @@
           <a:p>
             <a:pPr>
               <a:spcAft>
-                <a:spcPts val="400"/>
+                <a:spcPts val="314"/>
               </a:spcAft>
             </a:pPr>
             <a:r>
-              <a:rPr sz="1400" b="0" i="0">
+              <a:rPr sz="1100" b="0" i="0">
                 <a:solidFill>
                   <a:srgbClr val="FFFFFF"/>
                 </a:solidFill>
@@ -7401,11 +7401,11 @@
           <a:p>
             <a:pPr>
               <a:spcAft>
-                <a:spcPts val="400"/>
+                <a:spcPts val="314"/>
               </a:spcAft>
             </a:pPr>
             <a:r>
-              <a:rPr sz="1400" b="0" i="0">
+              <a:rPr sz="1100" b="0" i="0">
                 <a:solidFill>
                   <a:srgbClr val="FFFFFF"/>
                 </a:solidFill>
@@ -7417,11 +7417,11 @@
           <a:p>
             <a:pPr>
               <a:spcAft>
-                <a:spcPts val="400"/>
+                <a:spcPts val="314"/>
               </a:spcAft>
             </a:pPr>
             <a:r>
-              <a:rPr sz="1400" b="0" i="0">
+              <a:rPr sz="1100" b="0" i="0">
                 <a:solidFill>
                   <a:srgbClr val="FFFFFF"/>
                 </a:solidFill>
@@ -7676,7 +7676,7 @@
               </a:spcAft>
             </a:pPr>
             <a:r>
-              <a:rPr sz="1600" b="0" i="0">
+              <a:rPr sz="2000" b="0" i="0">
                 <a:solidFill>
                   <a:srgbClr val="333333"/>
                 </a:solidFill>
@@ -7685,7 +7685,7 @@
               <a:t>–   </a:t>
             </a:r>
             <a:r>
-              <a:rPr sz="1600" b="1" i="0">
+              <a:rPr sz="2000" b="1" i="0">
                 <a:solidFill>
                   <a:srgbClr val="333333"/>
                 </a:solidFill>
@@ -7694,7 +7694,7 @@
               <a:t>Herramienta:</a:t>
             </a:r>
             <a:r>
-              <a:rPr sz="1600" b="0" i="0">
+              <a:rPr sz="2000" b="0" i="0">
                 <a:solidFill>
                   <a:srgbClr val="333333"/>
                 </a:solidFill>
@@ -7710,7 +7710,7 @@
               </a:spcAft>
             </a:pPr>
             <a:r>
-              <a:rPr sz="1600" b="0" i="0">
+              <a:rPr sz="2000" b="0" i="0">
                 <a:solidFill>
                   <a:srgbClr val="333333"/>
                 </a:solidFill>
@@ -7719,7 +7719,7 @@
               <a:t>–   </a:t>
             </a:r>
             <a:r>
-              <a:rPr sz="1600" b="1" i="0">
+              <a:rPr sz="2000" b="1" i="0">
                 <a:solidFill>
                   <a:srgbClr val="333333"/>
                 </a:solidFill>
@@ -7728,7 +7728,7 @@
               <a:t>Demo:</a:t>
             </a:r>
             <a:r>
-              <a:rPr sz="1600" b="0" i="0">
+              <a:rPr sz="2000" b="0" i="0">
                 <a:solidFill>
                   <a:srgbClr val="333333"/>
                 </a:solidFill>
@@ -7744,7 +7744,7 @@
               </a:spcAft>
             </a:pPr>
             <a:r>
-              <a:rPr sz="1600" b="0" i="0">
+              <a:rPr sz="2000" b="0" i="0">
                 <a:solidFill>
                   <a:srgbClr val="333333"/>
                 </a:solidFill>
@@ -7964,7 +7964,7 @@
               </a:spcAft>
             </a:pPr>
             <a:r>
-              <a:rPr sz="1600" b="0" i="0">
+              <a:rPr sz="2000" b="0" i="0">
                 <a:solidFill>
                   <a:srgbClr val="333333"/>
                 </a:solidFill>
@@ -7973,7 +7973,7 @@
               <a:t>–   </a:t>
             </a:r>
             <a:r>
-              <a:rPr sz="1600" b="1" i="0">
+              <a:rPr sz="2000" b="1" i="0">
                 <a:solidFill>
                   <a:srgbClr val="333333"/>
                 </a:solidFill>
@@ -7982,7 +7982,7 @@
               <a:t>Por que importa al PI:</a:t>
             </a:r>
             <a:r>
-              <a:rPr sz="1600" b="0" i="0">
+              <a:rPr sz="2000" b="0" i="0">
                 <a:solidFill>
                   <a:srgbClr val="333333"/>
                 </a:solidFill>
@@ -7998,7 +7998,7 @@
               </a:spcAft>
             </a:pPr>
             <a:r>
-              <a:rPr sz="1600" b="0" i="0">
+              <a:rPr sz="2000" b="0" i="0">
                 <a:solidFill>
                   <a:srgbClr val="333333"/>
                 </a:solidFill>
@@ -8014,7 +8014,7 @@
               </a:spcAft>
             </a:pPr>
             <a:r>
-              <a:rPr sz="1600" b="0" i="0">
+              <a:rPr sz="2000" b="0" i="0">
                 <a:solidFill>
                   <a:srgbClr val="333333"/>
                 </a:solidFill>
@@ -8234,7 +8234,7 @@
               </a:spcAft>
             </a:pPr>
             <a:r>
-              <a:rPr sz="1600" b="0" i="0">
+              <a:rPr sz="2000" b="0" i="0">
                 <a:solidFill>
                   <a:srgbClr val="333333"/>
                 </a:solidFill>
@@ -8250,7 +8250,7 @@
               </a:spcAft>
             </a:pPr>
             <a:r>
-              <a:rPr sz="1600" b="0" i="0">
+              <a:rPr sz="2000" b="0" i="0">
                 <a:solidFill>
                   <a:srgbClr val="333333"/>
                 </a:solidFill>
@@ -8266,7 +8266,7 @@
               </a:spcAft>
             </a:pPr>
             <a:r>
-              <a:rPr sz="1600" b="0" i="0">
+              <a:rPr sz="2000" b="0" i="0">
                 <a:solidFill>
                   <a:srgbClr val="333333"/>
                 </a:solidFill>
@@ -8602,7 +8602,7 @@
           <a:lstStyle/>
           <a:p>
             <a:r>
-              <a:rPr sz="1500" b="1" i="0">
+              <a:rPr sz="1400" b="1" i="0">
                 <a:solidFill>
                   <a:srgbClr val="095292"/>
                 </a:solidFill>
@@ -8757,7 +8757,7 @@
           <a:lstStyle/>
           <a:p>
             <a:r>
-              <a:rPr sz="1500" b="1" i="0">
+              <a:rPr sz="1400" b="1" i="0">
                 <a:solidFill>
                   <a:srgbClr val="095292"/>
                 </a:solidFill>
@@ -8912,7 +8912,7 @@
           <a:lstStyle/>
           <a:p>
             <a:r>
-              <a:rPr sz="1500" b="1" i="0">
+              <a:rPr sz="1400" b="1" i="0">
                 <a:solidFill>
                   <a:srgbClr val="095292"/>
                 </a:solidFill>
@@ -9067,7 +9067,7 @@
           <a:lstStyle/>
           <a:p>
             <a:r>
-              <a:rPr sz="1500" b="1" i="0">
+              <a:rPr sz="1400" b="1" i="0">
                 <a:solidFill>
                   <a:srgbClr val="095292"/>
                 </a:solidFill>
@@ -9222,7 +9222,7 @@
           <a:lstStyle/>
           <a:p>
             <a:r>
-              <a:rPr sz="1500" b="1" i="0">
+              <a:rPr sz="1400" b="1" i="0">
                 <a:solidFill>
                   <a:srgbClr val="095292"/>
                 </a:solidFill>

--- a/Programacion II/Clases/Clase 2 - Colecciones dinamicas ArrayList/Presentacion.pptx
+++ b/Programacion II/Clases/Clase 2 - Colecciones dinamicas ArrayList/Presentacion.pptx
@@ -4351,7 +4351,7 @@
                 </a:solidFill>
                 <a:latin typeface="Calibri"/>
               </a:rPr>
-              <a:t> Proyecto NetBeans con las clases Mascota y RegistroMascotas y un menu de consola que agrega, lista, busca por ID y elimina mascotas, comprimido y subido a ExamLab.</a:t>
+              <a:t> Proyecto Java con las clases Mascota y RegistroMascotas y un menu de consola que agrega, lista, busca por ID y elimina mascotas, comprimido y subido a la plataforma del curso.</a:t>
             </a:r>
           </a:p>
           <a:p>
@@ -4512,7 +4512,7 @@
                 </a:solidFill>
                 <a:latin typeface="Calibri"/>
               </a:rPr>
-              <a:t>Entrega en ExamLab (https://uniaj.examlab.workers.dev/)</a:t>
+              <a:t>Entrega en la plataforma del curso</a:t>
             </a:r>
             <a:r>
               <a:rPr sz="2000" b="0" i="0">
@@ -4521,7 +4521,7 @@
                 </a:solidFill>
                 <a:latin typeface="Calibri"/>
               </a:rPr>
-              <a:t> — domingo 23:59.</a:t>
+              <a:t> — en la fecha que indique el docente.</a:t>
             </a:r>
           </a:p>
         </p:txBody>
@@ -5116,7 +5116,7 @@
                 </a:solidFill>
                 <a:latin typeface="Calibri"/>
               </a:rPr>
-              <a:t>Entrega del taller en ExamLab (https://uniaj.examlab.workers.dev/) · domingo 23:59.</a:t>
+              <a:t>Entrega del taller, si el docente lo asigna · en la fecha que indique el docente.</a:t>
             </a:r>
           </a:p>
         </p:txBody>
@@ -5332,7 +5332,7 @@
                 </a:solidFill>
                 <a:latin typeface="Calibri"/>
               </a:rPr>
-              <a:t>Entregable: Proyecto NetBeans con las clases Mascota y RegistroMascotas y un menu de consola que agrega, lista, busca por ID y elimina mascotas, comprimido y subido a ExamLab.</a:t>
+              <a:t>Entregable: Proyecto Java con las clases Mascota y RegistroMascotas y un menu de consola que agrega, lista, busca por ID y elimina mascotas, comprimido y subido a la plataforma del curso.</a:t>
             </a:r>
           </a:p>
           <a:p>
@@ -5611,7 +5611,7 @@
                 </a:solidFill>
                 <a:latin typeface="Calibri"/>
               </a:rPr>
-              <a:t>Apache NetBeans</a:t>
+              <a:t>Visual Studio Code (Java)</a:t>
             </a:r>
             <a:r>
               <a:rPr sz="2000" b="0" i="0">
@@ -5663,7 +5663,7 @@
                 </a:solidFill>
                 <a:latin typeface="Calibri"/>
               </a:rPr>
-              <a:t> Proyecto NetBeans con las clases Mascota y RegistroMascotas y un menu de consola que agrega, lista, busca por ID y elimina mascotas, comprimido y subido a ExamLab.</a:t>
+              <a:t> Proyecto Java con las clases Mascota y RegistroMascotas y un menu de consola que agrega, lista, busca por ID y elimina mascotas, comprimido y subido a la plataforma del curso.</a:t>
             </a:r>
           </a:p>
           <a:p>
@@ -7315,7 +7315,7 @@
                 </a:solidFill>
                 <a:latin typeface="Calibri"/>
               </a:rPr>
-              <a:t>for (Mascota x : mascotas) {                 // for-each: solo para LEER</a:t>
+              <a:t>for (Mascota x: mascotas) {                 // for-each: solo para LEER</a:t>
             </a:r>
           </a:p>
           <a:p>
@@ -7700,7 +7700,7 @@
                 </a:solidFill>
                 <a:latin typeface="Calibri"/>
               </a:rPr>
-              <a:t> Apache NetBeans</a:t>
+              <a:t> Visual Studio Code (Java)</a:t>
             </a:r>
           </a:p>
           <a:p>
@@ -8608,7 +8608,7 @@
                 </a:solidFill>
                 <a:latin typeface="Calibri"/>
               </a:rPr>
-              <a:t>Cree en NetBeans el proyecto Java Application llamado VetCare con paquete vetcare, y dentro de el la clase Mascota con los atributos privados id, nombre, especie, edad y dueno, su constructor completo, sus getters y el metodo toString(); verifique imprimiendo una mascota de prueba y confirmando que en consola sale el texto legible y no vetcare.Mascota@1a2b3c.</a:t>
+              <a:t>Cree en VS Code el proyecto Java llamado VetCare con paquete vetcare, y dentro de el la clase Mascota con los atributos privados id, nombre, especie, edad y dueno, su constructor completo, sus getters y el metodo toString(); verifique imprimiendo una mascota de prueba y confirmando que en consola sale el texto legible y no vetcare.Mascota@1a2b3c.</a:t>
             </a:r>
           </a:p>
         </p:txBody>
@@ -9228,7 +9228,7 @@
                 </a:solidFill>
                 <a:latin typeface="Calibri"/>
               </a:rPr>
-              <a:t>Arme un menu de consola con Scanner y opciones 1-Agregar, 2-Listar, 3-Buscar por ID, 4-Eliminar, 5-Salir dentro de un ciclo while; ejecute el programa cargando las seis fichas del escenario, tome captura de la consola con el listado final y suba el proyecto comprimido mas la captura a ExamLab.</a:t>
+              <a:t>Arme un menu de consola con Scanner y opciones 1-Agregar, 2-Listar, 3-Buscar por ID, 4-Eliminar, 5-Salir dentro de un ciclo while; ejecute el programa cargando las seis fichas del escenario, tome captura de la consola con el listado final y suba el proyecto comprimido mas la captura a la plataforma del curso.</a:t>
             </a:r>
           </a:p>
         </p:txBody>
